--- a/classes/parte-0-fundamentos-y-prerrequisitos/021-criptografia-conceptos-fundamentales-e-intuicion/clase-021-presentacion.pptx
+++ b/classes/parte-0-fundamentos-y-prerrequisitos/021-criptografia-conceptos-fundamentales-e-intuicion/clase-021-presentacion.pptx
@@ -17,6 +17,10 @@
     <p:sldId id="265" r:id="rId16"/>
     <p:sldId id="266" r:id="rId17"/>
     <p:sldId id="267" r:id="rId18"/>
+    <p:sldId id="268" r:id="rId19"/>
+    <p:sldId id="269" r:id="rId20"/>
+    <p:sldId id="270" r:id="rId21"/>
+    <p:sldId id="271" r:id="rId22"/>
   </p:sldIdLst>
   <p:sldSz cx="9144000" cy="6858000" type="screen4x3"/>
   <p:notesSz cx="6858000" cy="9144000"/>
@@ -3198,7 +3202,7 @@
                   <a:srgbClr val="0B3D2E"/>
                 </a:solidFill>
               </a:rPr>
-              <a:t>⚠️ Errores comunes</a:t>
+              <a:t>✍️ Ejercicios</a:t>
             </a:r>
           </a:p>
         </p:txBody>
@@ -3236,67 +3240,97 @@
                   <a:srgbClr val="22282E"/>
                 </a:solidFill>
               </a:rPr>
-              <a:t>•  Almacenar contraseñas con SHA-256 sin sal — Vulnerable a rainbow tables y GPU cracking. Usa bcrypt/argon2 con sal.</a:t>
-            </a:r>
-          </a:p>
-          <a:p>
-            <a:pPr>
-              <a:spcAft>
-                <a:spcPts val="600"/>
-              </a:spcAft>
-            </a:pPr>
-            <a:r>
-              <a:rPr sz="1500">
-                <a:solidFill>
-                  <a:srgbClr val="22282E"/>
-                </a:solidFill>
-              </a:rPr>
-              <a:t>•  Reutilizar el nonce en AES-GCM — Rompe la seguridad del cifrado. Genera un nonce único por mensaje.</a:t>
-            </a:r>
-          </a:p>
-          <a:p>
-            <a:pPr>
-              <a:spcAft>
-                <a:spcPts val="600"/>
-              </a:spcAft>
-            </a:pPr>
-            <a:r>
-              <a:rPr sz="1500">
-                <a:solidFill>
-                  <a:srgbClr val="22282E"/>
-                </a:solidFill>
-              </a:rPr>
-              <a:t>•  Implementar AES "a mano" — Errores sutiles = inseguro. Usa librerías auditadas.</a:t>
-            </a:r>
-          </a:p>
-          <a:p>
-            <a:pPr>
-              <a:spcAft>
-                <a:spcPts val="600"/>
-              </a:spcAft>
-            </a:pPr>
-            <a:r>
-              <a:rPr sz="1500">
-                <a:solidFill>
-                  <a:srgbClr val="22282E"/>
-                </a:solidFill>
-              </a:rPr>
-              <a:t>•  Usar MD5/SHA-1 para firmas o integridad — Están rotos por colisiones. Migra a SHA-256/SHA-3.</a:t>
-            </a:r>
-          </a:p>
-          <a:p>
-            <a:pPr>
-              <a:spcAft>
-                <a:spcPts val="600"/>
-              </a:spcAft>
-            </a:pPr>
-            <a:r>
-              <a:rPr sz="1500">
-                <a:solidFill>
-                  <a:srgbClr val="22282E"/>
-                </a:solidFill>
-              </a:rPr>
-              <a:t>•  Cifrar sin autenticar (solo AES-CBC) — Permite manipulación. Usa modos autenticados (GCM) o "encrypt-then-MAC".</a:t>
+              <a:t>•  Explica con un ejemplo concreto cuándo usarías cifrado simétrico y cuándo asimétrico, y por qué TLS combina ambos en cada conexión.</a:t>
+            </a:r>
+          </a:p>
+          <a:p>
+            <a:pPr>
+              <a:spcAft>
+                <a:spcPts val="600"/>
+              </a:spcAft>
+            </a:pPr>
+            <a:r>
+              <a:rPr sz="1500">
+                <a:solidFill>
+                  <a:srgbClr val="22282E"/>
+                </a:solidFill>
+              </a:rPr>
+              <a:t>•  Enumera las tres propiedades de seguridad de una función hash criptográfica y explica qué protege cada una.</a:t>
+            </a:r>
+          </a:p>
+          <a:p>
+            <a:pPr>
+              <a:spcAft>
+                <a:spcPts val="600"/>
+              </a:spcAft>
+            </a:pPr>
+            <a:r>
+              <a:rPr sz="1500">
+                <a:solidFill>
+                  <a:srgbClr val="22282E"/>
+                </a:solidFill>
+              </a:rPr>
+              <a:t>•  Justifica por qué SHA-256 no es adecuado para almacenar contraseñas y qué debe usarse en su lugar, mencionando el papel de la sal y del factor de coste.</a:t>
+            </a:r>
+          </a:p>
+          <a:p>
+            <a:pPr>
+              <a:spcAft>
+                <a:spcPts val="600"/>
+              </a:spcAft>
+            </a:pPr>
+            <a:r>
+              <a:rPr sz="1500">
+                <a:solidFill>
+                  <a:srgbClr val="22282E"/>
+                </a:solidFill>
+              </a:rPr>
+              <a:t>•  Describe cómo una firma digital aporta a la vez integridad, autenticidad y no repudio, y en qué se diferencia de un HMAC.</a:t>
+            </a:r>
+          </a:p>
+          <a:p>
+            <a:pPr>
+              <a:spcAft>
+                <a:spcPts val="600"/>
+              </a:spcAft>
+            </a:pPr>
+            <a:r>
+              <a:rPr sz="1500">
+                <a:solidFill>
+                  <a:srgbClr val="22282E"/>
+                </a:solidFill>
+              </a:rPr>
+              <a:t>•  Explica el papel del IV/nonce en un cifrado y qué puede ocurrir si se reutiliza en un modo como AES-GCM.</a:t>
+            </a:r>
+          </a:p>
+          <a:p>
+            <a:pPr>
+              <a:spcAft>
+                <a:spcPts val="600"/>
+              </a:spcAft>
+            </a:pPr>
+            <a:r>
+              <a:rPr sz="1500">
+                <a:solidFill>
+                  <a:srgbClr val="22282E"/>
+                </a:solidFill>
+              </a:rPr>
+              <a:t>•  Investiga cómo Diffie-Hellman permite que dos partes acuerden una clave compartida sin transmitirla, y qué es el "secreto hacia adelante" (forward secrecy).</a:t>
+            </a:r>
+          </a:p>
+          <a:p>
+            <a:pPr>
+              <a:spcAft>
+                <a:spcPts val="600"/>
+              </a:spcAft>
+            </a:pPr>
+            <a:r>
+              <a:rPr sz="1500">
+                <a:solidFill>
+                  <a:srgbClr val="22282E"/>
+                </a:solidFill>
+              </a:rPr>
+              <a:t>•  Compara RSA y ECC en tamaño de clave y rendimiento, y explica por qué ECC se prefiere en dispositivos modernos.</a:t>
             </a:r>
           </a:p>
         </p:txBody>
@@ -3347,7 +3381,7 @@
                   <a:srgbClr val="0B3D2E"/>
                 </a:solidFill>
               </a:rPr>
-              <a:t>❓ Preguntas frecuentes</a:t>
+              <a:t>📝 Reto verificable</a:t>
             </a:r>
           </a:p>
         </p:txBody>
@@ -3385,52 +3419,22 @@
                   <a:srgbClr val="22282E"/>
                 </a:solidFill>
               </a:rPr>
-              <a:t>•  ❓ ¿Por qué "no inventes tu propia cripto"? Porque las primitivas son fáciles de implementar mal de formas invisibles pero catastróficas (timing, padding, nonces). Las librerías establecidas han sido auditadas por expertos durante años.</a:t>
-            </a:r>
-          </a:p>
-          <a:p>
-            <a:pPr>
-              <a:spcAft>
-                <a:spcPts val="600"/>
-              </a:spcAft>
-            </a:pPr>
-            <a:r>
-              <a:rPr sz="1500">
-                <a:solidFill>
-                  <a:srgbClr val="22282E"/>
-                </a:solidFill>
-              </a:rPr>
-              <a:t>•  ❓ ¿Cifrado o hashing para contraseñas? Ninguno de los dos "a secas": se usa un hash de contraseñas lento y con sal (bcrypt/scrypt/argon2), diseñado para resistir fuerza bruta.</a:t>
-            </a:r>
-          </a:p>
-          <a:p>
-            <a:pPr>
-              <a:spcAft>
-                <a:spcPts val="600"/>
-              </a:spcAft>
-            </a:pPr>
-            <a:r>
-              <a:rPr sz="1500">
-                <a:solidFill>
-                  <a:srgbClr val="22282E"/>
-                </a:solidFill>
-              </a:rPr>
-              <a:t>•  ❓ ¿RSA está obsoleto? No, pero la criptografía de curva elíptica (ECC) ofrece la misma seguridad con claves más pequeñas y es preferida hoy. Ambos conviven.</a:t>
-            </a:r>
-          </a:p>
-          <a:p>
-            <a:pPr>
-              <a:spcAft>
-                <a:spcPts val="600"/>
-              </a:spcAft>
-            </a:pPr>
-            <a:r>
-              <a:rPr sz="1500">
-                <a:solidFill>
-                  <a:srgbClr val="22282E"/>
-                </a:solidFill>
-              </a:rPr>
-              <a:t>•  ❓ ¿Qué es la criptografía post-cuántica? Algoritmos resistentes a computadores cuánticos, que amenazan RSA/ECC. El NIST ya estandariza esquemas PQC; es un tema emergente que solo introducimos aquí.</a:t>
+              <a:t>•  Implementa securebox.py, una herramienta de línea de comandos que cifre y descifre un archivo con AES-GCM, derivando la clave de una contraseña mediante un KDF adecuado (scrypt o argon2) con sal…</a:t>
+            </a:r>
+          </a:p>
+          <a:p>
+            <a:pPr>
+              <a:spcAft>
+                <a:spcPts val="600"/>
+              </a:spcAft>
+            </a:pPr>
+            <a:r>
+              <a:rPr sz="1500">
+                <a:solidFill>
+                  <a:srgbClr val="22282E"/>
+                </a:solidFill>
+              </a:rPr>
+              <a:t>•  Criterio de aceptación: un archivo cifrado y luego descifrado con la contraseña correcta se recupera idéntico (mismo SHA-256 que el original); alterar un solo byte del cifrado o usar una contraseña…</a:t>
             </a:r>
           </a:p>
         </p:txBody>
@@ -3481,7 +3485,7 @@
                   <a:srgbClr val="0B3D2E"/>
                 </a:solidFill>
               </a:rPr>
-              <a:t>🔗 Referencias</a:t>
+              <a:t>⚠️ Errores comunes</a:t>
             </a:r>
           </a:p>
         </p:txBody>
@@ -3519,6 +3523,334 @@
                   <a:srgbClr val="22282E"/>
                 </a:solidFill>
               </a:rPr>
+              <a:t>•  Almacenar contraseñas con SHA-256 sin sal — Vulnerable a rainbow tables y cracking por GPU. Usa bcrypt/scrypt/argon2 con sal.</a:t>
+            </a:r>
+          </a:p>
+          <a:p>
+            <a:pPr>
+              <a:spcAft>
+                <a:spcPts val="600"/>
+              </a:spcAft>
+            </a:pPr>
+            <a:r>
+              <a:rPr sz="1500">
+                <a:solidFill>
+                  <a:srgbClr val="22282E"/>
+                </a:solidFill>
+              </a:rPr>
+              <a:t>•  Reutilizar el nonce en AES-GCM — Rompe la confidencialidad y puede filtrar la clave de autenticación. Genera un nonce único por mensaje.</a:t>
+            </a:r>
+          </a:p>
+          <a:p>
+            <a:pPr>
+              <a:spcAft>
+                <a:spcPts val="600"/>
+              </a:spcAft>
+            </a:pPr>
+            <a:r>
+              <a:rPr sz="1500">
+                <a:solidFill>
+                  <a:srgbClr val="22282E"/>
+                </a:solidFill>
+              </a:rPr>
+              <a:t>•  Implementar AES o RSA "a mano" — Errores sutiles (timing, padding) que pasan inadvertidos = inseguro. Usa librerías auditadas.</a:t>
+            </a:r>
+          </a:p>
+          <a:p>
+            <a:pPr>
+              <a:spcAft>
+                <a:spcPts val="600"/>
+              </a:spcAft>
+            </a:pPr>
+            <a:r>
+              <a:rPr sz="1500">
+                <a:solidFill>
+                  <a:srgbClr val="22282E"/>
+                </a:solidFill>
+              </a:rPr>
+              <a:t>•  Usar MD5/SHA-1 para firmas o integridad — Rotos por colisiones prácticas. Migra a SHA-256/SHA-3.</a:t>
+            </a:r>
+          </a:p>
+          <a:p>
+            <a:pPr>
+              <a:spcAft>
+                <a:spcPts val="600"/>
+              </a:spcAft>
+            </a:pPr>
+            <a:r>
+              <a:rPr sz="1500">
+                <a:solidFill>
+                  <a:srgbClr val="22282E"/>
+                </a:solidFill>
+              </a:rPr>
+              <a:t>•  Cifrar sin autenticar (solo AES-CBC) — Permite manipulación indetectable del cifrado. Usa AEAD (GCM) o encrypt-then-MAC.</a:t>
+            </a:r>
+          </a:p>
+          <a:p>
+            <a:pPr>
+              <a:spcAft>
+                <a:spcPts val="600"/>
+              </a:spcAft>
+            </a:pPr>
+            <a:r>
+              <a:rPr sz="1500">
+                <a:solidFill>
+                  <a:srgbClr val="22282E"/>
+                </a:solidFill>
+              </a:rPr>
+              <a:t>•  Confundir cifrar con hashear una contraseña — Cifrar es reversible; una contraseña se guarda con un KDF de un solo sentido.</a:t>
+            </a:r>
+          </a:p>
+          <a:p>
+            <a:pPr>
+              <a:spcAft>
+                <a:spcPts val="600"/>
+              </a:spcAft>
+            </a:pPr>
+            <a:r>
+              <a:rPr sz="1500">
+                <a:solidFill>
+                  <a:srgbClr val="22282E"/>
+                </a:solidFill>
+              </a:rPr>
+              <a:t>•  IV o nonce predecible o fijo — Deja patrones explotables. Genera valores aleatorios con un CSPRNG (os.urandom).</a:t>
+            </a:r>
+          </a:p>
+        </p:txBody>
+      </p:sp>
+    </p:spTree>
+  </p:cSld>
+  <p:clrMapOvr>
+    <a:masterClrMapping/>
+  </p:clrMapOvr>
+</p:sld>
+</file>
+
+<file path=ppt/slides/slide13.xml><?xml version="1.0" encoding="utf-8"?>
+<p:sld xmlns:a="http://schemas.openxmlformats.org/drawingml/2006/main" xmlns:p="http://schemas.openxmlformats.org/presentationml/2006/main" xmlns:r="http://schemas.openxmlformats.org/officeDocument/2006/relationships">
+  <p:cSld>
+    <p:spTree>
+      <p:nvGrpSpPr>
+        <p:cNvPr id="1" name=""/>
+        <p:cNvGrpSpPr/>
+        <p:nvPr/>
+      </p:nvGrpSpPr>
+      <p:grpSpPr/>
+      <p:sp>
+        <p:nvSpPr>
+          <p:cNvPr id="2" name="TextBox 1"/>
+          <p:cNvSpPr txBox="1"/>
+          <p:nvPr/>
+        </p:nvSpPr>
+        <p:spPr>
+          <a:xfrm>
+            <a:off x="457200" y="320040"/>
+            <a:ext cx="8229600" cy="822960"/>
+          </a:xfrm>
+          <a:prstGeom prst="rect">
+            <a:avLst/>
+          </a:prstGeom>
+          <a:noFill/>
+        </p:spPr>
+        <p:txBody>
+          <a:bodyPr wrap="square">
+            <a:spAutoFit/>
+          </a:bodyPr>
+          <a:lstStyle/>
+          <a:p>
+            <a:r>
+              <a:rPr sz="2600" b="1">
+                <a:solidFill>
+                  <a:srgbClr val="0B3D2E"/>
+                </a:solidFill>
+              </a:rPr>
+              <a:t>❓ Preguntas frecuentes</a:t>
+            </a:r>
+          </a:p>
+        </p:txBody>
+      </p:sp>
+      <p:sp>
+        <p:nvSpPr>
+          <p:cNvPr id="3" name="TextBox 2"/>
+          <p:cNvSpPr txBox="1"/>
+          <p:nvPr/>
+        </p:nvSpPr>
+        <p:spPr>
+          <a:xfrm>
+            <a:off x="457200" y="1280160"/>
+            <a:ext cx="8229600" cy="4937760"/>
+          </a:xfrm>
+          <a:prstGeom prst="rect">
+            <a:avLst/>
+          </a:prstGeom>
+          <a:noFill/>
+        </p:spPr>
+        <p:txBody>
+          <a:bodyPr wrap="square">
+            <a:spAutoFit/>
+          </a:bodyPr>
+          <a:lstStyle/>
+          <a:p>
+            <a:pPr>
+              <a:spcAft>
+                <a:spcPts val="600"/>
+              </a:spcAft>
+            </a:pPr>
+            <a:r>
+              <a:rPr sz="1500">
+                <a:solidFill>
+                  <a:srgbClr val="22282E"/>
+                </a:solidFill>
+              </a:rPr>
+              <a:t>•  ❓ ¿Por qué "no inventes tu propia cripto"? Porque las primitivas son fáciles de implementar mal de formas invisibles pero catastróficas: fugas por tiempo de ejecución, padding mal validado, nonces…</a:t>
+            </a:r>
+          </a:p>
+          <a:p>
+            <a:pPr>
+              <a:spcAft>
+                <a:spcPts val="600"/>
+              </a:spcAft>
+            </a:pPr>
+            <a:r>
+              <a:rPr sz="1500">
+                <a:solidFill>
+                  <a:srgbClr val="22282E"/>
+                </a:solidFill>
+              </a:rPr>
+              <a:t>•  ❓ ¿Cifrado o hashing para contraseñas? Ninguno de los dos a secas. Se usa un hash de contraseñas lento y con sal (bcrypt/scrypt/argon2), diseñado específicamente para resistir la fuerza bruta. Cifrar…</a:t>
+            </a:r>
+          </a:p>
+          <a:p>
+            <a:pPr>
+              <a:spcAft>
+                <a:spcPts val="600"/>
+              </a:spcAft>
+            </a:pPr>
+            <a:r>
+              <a:rPr sz="1500">
+                <a:solidFill>
+                  <a:srgbClr val="22282E"/>
+                </a:solidFill>
+              </a:rPr>
+              <a:t>•  ❓ ¿RSA está obsoleto? No, sigue siendo seguro con tamaños de clave adecuados, pero la criptografía de curva elíptica (ECC) ofrece la misma seguridad con claves mucho más pequeñas y mejor rendimiento…</a:t>
+            </a:r>
+          </a:p>
+          <a:p>
+            <a:pPr>
+              <a:spcAft>
+                <a:spcPts val="600"/>
+              </a:spcAft>
+            </a:pPr>
+            <a:r>
+              <a:rPr sz="1500">
+                <a:solidFill>
+                  <a:srgbClr val="22282E"/>
+                </a:solidFill>
+              </a:rPr>
+              <a:t>•  ❓ ¿Qué es la criptografía post-cuántica? Son algoritmos diseñados para resistir a un computador cuántico capaz de romper RSA y ECC mediante el algoritmo de Shor. El NIST ya ha estandarizado los…</a:t>
+            </a:r>
+          </a:p>
+          <a:p>
+            <a:pPr>
+              <a:spcAft>
+                <a:spcPts val="600"/>
+              </a:spcAft>
+            </a:pPr>
+            <a:r>
+              <a:rPr sz="1500">
+                <a:solidFill>
+                  <a:srgbClr val="22282E"/>
+                </a:solidFill>
+              </a:rPr>
+              <a:t>•  ❓ ¿Un hash sirve para verificar que un archivo no fue manipulado por un atacante? Solo si el hash de referencia llega por un canal confiable e independiente. Frente a un adversario que controla el…</a:t>
+            </a:r>
+          </a:p>
+        </p:txBody>
+      </p:sp>
+    </p:spTree>
+  </p:cSld>
+  <p:clrMapOvr>
+    <a:masterClrMapping/>
+  </p:clrMapOvr>
+</p:sld>
+</file>
+
+<file path=ppt/slides/slide14.xml><?xml version="1.0" encoding="utf-8"?>
+<p:sld xmlns:a="http://schemas.openxmlformats.org/drawingml/2006/main" xmlns:p="http://schemas.openxmlformats.org/presentationml/2006/main" xmlns:r="http://schemas.openxmlformats.org/officeDocument/2006/relationships">
+  <p:cSld>
+    <p:spTree>
+      <p:nvGrpSpPr>
+        <p:cNvPr id="1" name=""/>
+        <p:cNvGrpSpPr/>
+        <p:nvPr/>
+      </p:nvGrpSpPr>
+      <p:grpSpPr/>
+      <p:sp>
+        <p:nvSpPr>
+          <p:cNvPr id="2" name="TextBox 1"/>
+          <p:cNvSpPr txBox="1"/>
+          <p:nvPr/>
+        </p:nvSpPr>
+        <p:spPr>
+          <a:xfrm>
+            <a:off x="457200" y="320040"/>
+            <a:ext cx="8229600" cy="822960"/>
+          </a:xfrm>
+          <a:prstGeom prst="rect">
+            <a:avLst/>
+          </a:prstGeom>
+          <a:noFill/>
+        </p:spPr>
+        <p:txBody>
+          <a:bodyPr wrap="square">
+            <a:spAutoFit/>
+          </a:bodyPr>
+          <a:lstStyle/>
+          <a:p>
+            <a:r>
+              <a:rPr sz="2600" b="1">
+                <a:solidFill>
+                  <a:srgbClr val="0B3D2E"/>
+                </a:solidFill>
+              </a:rPr>
+              <a:t>🔗 Referencias</a:t>
+            </a:r>
+          </a:p>
+        </p:txBody>
+      </p:sp>
+      <p:sp>
+        <p:nvSpPr>
+          <p:cNvPr id="3" name="TextBox 2"/>
+          <p:cNvSpPr txBox="1"/>
+          <p:nvPr/>
+        </p:nvSpPr>
+        <p:spPr>
+          <a:xfrm>
+            <a:off x="457200" y="1280160"/>
+            <a:ext cx="8229600" cy="4937760"/>
+          </a:xfrm>
+          <a:prstGeom prst="rect">
+            <a:avLst/>
+          </a:prstGeom>
+          <a:noFill/>
+        </p:spPr>
+        <p:txBody>
+          <a:bodyPr wrap="square">
+            <a:spAutoFit/>
+          </a:bodyPr>
+          <a:lstStyle/>
+          <a:p>
+            <a:pPr>
+              <a:spcAft>
+                <a:spcPts val="600"/>
+              </a:spcAft>
+            </a:pPr>
+            <a:r>
+              <a:rPr sz="1500">
+                <a:solidFill>
+                  <a:srgbClr val="22282E"/>
+                </a:solidFill>
+              </a:rPr>
               <a:t>•  Ferguson, Schneier &amp; Kohno, Cryptography Engineering.</a:t>
             </a:r>
           </a:p>
@@ -3549,7 +3881,22 @@
                   <a:srgbClr val="22282E"/>
                 </a:solidFill>
               </a:rPr>
-              <a:t>•  NIST Cryptographic Standards — &lt;https://csrc.nist.gov/projects/cryptographic-standards-and-guidelines&gt;</a:t>
+              <a:t>•  NIST Cryptographic Standards and Guidelines — &lt;https://csrc.nist.gov/projects/cryptographic-standards-and-guidelines&gt;</a:t>
+            </a:r>
+          </a:p>
+          <a:p>
+            <a:pPr>
+              <a:spcAft>
+                <a:spcPts val="600"/>
+              </a:spcAft>
+            </a:pPr>
+            <a:r>
+              <a:rPr sz="1500">
+                <a:solidFill>
+                  <a:srgbClr val="22282E"/>
+                </a:solidFill>
+              </a:rPr>
+              <a:t>•  NIST FIPS 197 (AES) — &lt;https://csrc.nist.gov/pubs/fips/197/final&gt;</a:t>
             </a:r>
           </a:p>
           <a:p>
@@ -3567,8 +3914,173 @@
               <a:t>•  OWASP Password Storage Cheat Sheet — &lt;https://cheatsheetseries.owasp.org/cheatsheets/PasswordStorageCheatSheet.html&gt;</a:t>
             </a:r>
           </a:p>
-        </p:txBody>
-      </p:sp>
+          <a:p>
+            <a:pPr>
+              <a:spcAft>
+                <a:spcPts val="600"/>
+              </a:spcAft>
+            </a:pPr>
+            <a:r>
+              <a:rPr sz="1500">
+                <a:solidFill>
+                  <a:srgbClr val="22282E"/>
+                </a:solidFill>
+              </a:rPr>
+              <a:t>•  RFC 2104 (HMAC) — &lt;https://www.rfc-editor.org/rfc/rfc2104&gt;</a:t>
+            </a:r>
+          </a:p>
+        </p:txBody>
+      </p:sp>
+    </p:spTree>
+  </p:cSld>
+  <p:clrMapOvr>
+    <a:masterClrMapping/>
+  </p:clrMapOvr>
+</p:sld>
+</file>
+
+<file path=ppt/slides/slide15.xml><?xml version="1.0" encoding="utf-8"?>
+<p:sld xmlns:a="http://schemas.openxmlformats.org/drawingml/2006/main" xmlns:p="http://schemas.openxmlformats.org/presentationml/2006/main" xmlns:r="http://schemas.openxmlformats.org/officeDocument/2006/relationships">
+  <p:cSld>
+    <p:spTree>
+      <p:nvGrpSpPr>
+        <p:cNvPr id="1" name=""/>
+        <p:cNvGrpSpPr/>
+        <p:nvPr/>
+      </p:nvGrpSpPr>
+      <p:grpSpPr/>
+      <p:sp>
+        <p:nvSpPr>
+          <p:cNvPr id="2" name="TextBox 1"/>
+          <p:cNvSpPr txBox="1"/>
+          <p:nvPr/>
+        </p:nvSpPr>
+        <p:spPr>
+          <a:xfrm>
+            <a:off x="457200" y="274320"/>
+            <a:ext cx="8229600" cy="640080"/>
+          </a:xfrm>
+          <a:prstGeom prst="rect">
+            <a:avLst/>
+          </a:prstGeom>
+          <a:noFill/>
+        </p:spPr>
+        <p:txBody>
+          <a:bodyPr wrap="square">
+            <a:spAutoFit/>
+          </a:bodyPr>
+          <a:lstStyle/>
+          <a:p>
+            <a:r>
+              <a:rPr sz="2200" b="1">
+                <a:solidFill>
+                  <a:srgbClr val="0B3D2E"/>
+                </a:solidFill>
+              </a:rPr>
+              <a:t>Diagrama 1</a:t>
+            </a:r>
+          </a:p>
+        </p:txBody>
+      </p:sp>
+      <p:pic>
+        <p:nvPicPr>
+          <p:cNvPr id="3" name="Picture 2" descr="ebcd9cedcc5abb1b.png"/>
+          <p:cNvPicPr>
+            <a:picLocks noChangeAspect="1"/>
+          </p:cNvPicPr>
+          <p:nvPr/>
+        </p:nvPicPr>
+        <p:blipFill>
+          <a:blip r:embed="rId2"/>
+          <a:stretch>
+            <a:fillRect/>
+          </a:stretch>
+        </p:blipFill>
+        <p:spPr>
+          <a:xfrm>
+            <a:off x="457200" y="3488436"/>
+            <a:ext cx="8229600" cy="521208"/>
+          </a:xfrm>
+          <a:prstGeom prst="rect">
+            <a:avLst/>
+          </a:prstGeom>
+        </p:spPr>
+      </p:pic>
+    </p:spTree>
+  </p:cSld>
+  <p:clrMapOvr>
+    <a:masterClrMapping/>
+  </p:clrMapOvr>
+</p:sld>
+</file>
+
+<file path=ppt/slides/slide16.xml><?xml version="1.0" encoding="utf-8"?>
+<p:sld xmlns:a="http://schemas.openxmlformats.org/drawingml/2006/main" xmlns:p="http://schemas.openxmlformats.org/presentationml/2006/main" xmlns:r="http://schemas.openxmlformats.org/officeDocument/2006/relationships">
+  <p:cSld>
+    <p:spTree>
+      <p:nvGrpSpPr>
+        <p:cNvPr id="1" name=""/>
+        <p:cNvGrpSpPr/>
+        <p:nvPr/>
+      </p:nvGrpSpPr>
+      <p:grpSpPr/>
+      <p:sp>
+        <p:nvSpPr>
+          <p:cNvPr id="2" name="TextBox 1"/>
+          <p:cNvSpPr txBox="1"/>
+          <p:nvPr/>
+        </p:nvSpPr>
+        <p:spPr>
+          <a:xfrm>
+            <a:off x="457200" y="274320"/>
+            <a:ext cx="8229600" cy="640080"/>
+          </a:xfrm>
+          <a:prstGeom prst="rect">
+            <a:avLst/>
+          </a:prstGeom>
+          <a:noFill/>
+        </p:spPr>
+        <p:txBody>
+          <a:bodyPr wrap="square">
+            <a:spAutoFit/>
+          </a:bodyPr>
+          <a:lstStyle/>
+          <a:p>
+            <a:r>
+              <a:rPr sz="2200" b="1">
+                <a:solidFill>
+                  <a:srgbClr val="0B3D2E"/>
+                </a:solidFill>
+              </a:rPr>
+              <a:t>Diagrama 2</a:t>
+            </a:r>
+          </a:p>
+        </p:txBody>
+      </p:sp>
+      <p:pic>
+        <p:nvPicPr>
+          <p:cNvPr id="3" name="Picture 2" descr="ca7b1c4895feec8a.png"/>
+          <p:cNvPicPr>
+            <a:picLocks noChangeAspect="1"/>
+          </p:cNvPicPr>
+          <p:nvPr/>
+        </p:nvPicPr>
+        <p:blipFill>
+          <a:blip r:embed="rId2"/>
+          <a:stretch>
+            <a:fillRect/>
+          </a:stretch>
+        </p:blipFill>
+        <p:spPr>
+          <a:xfrm>
+            <a:off x="3541175" y="1097280"/>
+            <a:ext cx="2061650" cy="5303520"/>
+          </a:xfrm>
+          <a:prstGeom prst="rect">
+            <a:avLst/>
+          </a:prstGeom>
+        </p:spPr>
+      </p:pic>
     </p:spTree>
   </p:cSld>
   <p:clrMapOvr>
@@ -3653,7 +4165,7 @@
                   <a:srgbClr val="22282E"/>
                 </a:solidFill>
               </a:rPr>
-              <a:t>•  Construir la intuición criptográfica que sostiene TLS, firmas, autenticación y almacenamiento seguro de contraseñas. Al terminar entenderás cifrado simétrico y asimétrico, funciones hash, HMAC, firmas digitales y por qué "nunca inventes tu propia cripto". No se trata de matemáticas avanzadas, sino de saber usar las primitivas correctas.</a:t>
+              <a:t>•  Construir la intuición criptográfica que sostiene silenciosamente casi todo lo que hacemos en seguridad: TLS que protege el tráfico web, firmas que garantizan la procedencia de un binario…</a:t>
             </a:r>
           </a:p>
         </p:txBody>
@@ -3757,67 +4269,82 @@
                   <a:srgbClr val="22282E"/>
                 </a:solidFill>
               </a:rPr>
-              <a:t>•  Distinguir cifrado simétrico de asimétrico y sus usos.</a:t>
-            </a:r>
-          </a:p>
-          <a:p>
-            <a:pPr>
-              <a:spcAft>
-                <a:spcPts val="600"/>
-              </a:spcAft>
-            </a:pPr>
-            <a:r>
-              <a:rPr sz="1500">
-                <a:solidFill>
-                  <a:srgbClr val="22282E"/>
-                </a:solidFill>
-              </a:rPr>
-              <a:t>•  Explicar funciones hash, colisiones y propiedades de seguridad.</a:t>
-            </a:r>
-          </a:p>
-          <a:p>
-            <a:pPr>
-              <a:spcAft>
-                <a:spcPts val="600"/>
-              </a:spcAft>
-            </a:pPr>
-            <a:r>
-              <a:rPr sz="1500">
-                <a:solidFill>
-                  <a:srgbClr val="22282E"/>
-                </a:solidFill>
-              </a:rPr>
-              <a:t>•  Diferenciar hashing de contraseñas (bcrypt/argon2) de hash genérico.</a:t>
-            </a:r>
-          </a:p>
-          <a:p>
-            <a:pPr>
-              <a:spcAft>
-                <a:spcPts val="600"/>
-              </a:spcAft>
-            </a:pPr>
-            <a:r>
-              <a:rPr sz="1500">
-                <a:solidFill>
-                  <a:srgbClr val="22282E"/>
-                </a:solidFill>
-              </a:rPr>
-              <a:t>•  Describir HMAC, firmas digitales e intercambio de claves.</a:t>
-            </a:r>
-          </a:p>
-          <a:p>
-            <a:pPr>
-              <a:spcAft>
-                <a:spcPts val="600"/>
-              </a:spcAft>
-            </a:pPr>
-            <a:r>
-              <a:rPr sz="1500">
-                <a:solidFill>
-                  <a:srgbClr val="22282E"/>
-                </a:solidFill>
-              </a:rPr>
-              <a:t>•  Aplicar primitivas correctas con una librería confiable.</a:t>
+              <a:t>•  Distinguir el cifrado simétrico del asimétrico, sus costes y por qué se combinan en la práctica.</a:t>
+            </a:r>
+          </a:p>
+          <a:p>
+            <a:pPr>
+              <a:spcAft>
+                <a:spcPts val="600"/>
+              </a:spcAft>
+            </a:pPr>
+            <a:r>
+              <a:rPr sz="1500">
+                <a:solidFill>
+                  <a:srgbClr val="22282E"/>
+                </a:solidFill>
+              </a:rPr>
+              <a:t>•  Explicar qué es una función hash criptográfica, sus tres propiedades de seguridad y qué significa que MD5 o SHA-1 estén "rotos".</a:t>
+            </a:r>
+          </a:p>
+          <a:p>
+            <a:pPr>
+              <a:spcAft>
+                <a:spcPts val="600"/>
+              </a:spcAft>
+            </a:pPr>
+            <a:r>
+              <a:rPr sz="1500">
+                <a:solidFill>
+                  <a:srgbClr val="22282E"/>
+                </a:solidFill>
+              </a:rPr>
+              <a:t>•  Diferenciar el hashing de contraseñas (bcrypt, scrypt, argon2) de un hash genérico y justificar por qué SHA-256 "pelado" no sirve.</a:t>
+            </a:r>
+          </a:p>
+          <a:p>
+            <a:pPr>
+              <a:spcAft>
+                <a:spcPts val="600"/>
+              </a:spcAft>
+            </a:pPr>
+            <a:r>
+              <a:rPr sz="1500">
+                <a:solidFill>
+                  <a:srgbClr val="22282E"/>
+                </a:solidFill>
+              </a:rPr>
+              <a:t>•  Describir cómo HMAC, las firmas digitales y el intercambio de claves aportan integridad, autenticidad y no repudio.</a:t>
+            </a:r>
+          </a:p>
+          <a:p>
+            <a:pPr>
+              <a:spcAft>
+                <a:spcPts val="600"/>
+              </a:spcAft>
+            </a:pPr>
+            <a:r>
+              <a:rPr sz="1500">
+                <a:solidFill>
+                  <a:srgbClr val="22282E"/>
+                </a:solidFill>
+              </a:rPr>
+              <a:t>•  Aplicar las primitivas adecuadas mediante una librería confiable, sin reimplementar algoritmos.</a:t>
+            </a:r>
+          </a:p>
+          <a:p>
+            <a:pPr>
+              <a:spcAft>
+                <a:spcPts val="600"/>
+              </a:spcAft>
+            </a:pPr>
+            <a:r>
+              <a:rPr sz="1500">
+                <a:solidFill>
+                  <a:srgbClr val="22282E"/>
+                </a:solidFill>
+              </a:rPr>
+              <a:t>•  Reconocer los errores clásicos (nonce reutilizado, cifrar sin autenticar, algoritmos obsoletos) antes de cometerlos.</a:t>
             </a:r>
           </a:p>
         </p:txBody>
@@ -3906,7 +4433,7 @@
                   <a:srgbClr val="22282E"/>
                 </a:solidFill>
               </a:rPr>
-              <a:t>•  1 — Terminología</a:t>
+              <a:t>•  1 — Terminología (CIA)</a:t>
             </a:r>
           </a:p>
           <a:p>
@@ -4047,7 +4574,7 @@
                   <a:srgbClr val="0B3D2E"/>
                 </a:solidFill>
               </a:rPr>
-              <a:t>📖 Definiciones y características</a:t>
+              <a:t>🧠 Explicación en profundidad</a:t>
             </a:r>
           </a:p>
         </p:txBody>
@@ -4085,82 +4612,82 @@
                   <a:srgbClr val="22282E"/>
                 </a:solidFill>
               </a:rPr>
-              <a:t>•  Cifrado simétrico: misma clave cifra y descifra (AES). Clave: rápido; problema = distribuir la clave de forma segura.</a:t>
-            </a:r>
-          </a:p>
-          <a:p>
-            <a:pPr>
-              <a:spcAft>
-                <a:spcPts val="600"/>
-              </a:spcAft>
-            </a:pPr>
-            <a:r>
-              <a:rPr sz="1500">
-                <a:solidFill>
-                  <a:srgbClr val="22282E"/>
-                </a:solidFill>
-              </a:rPr>
-              <a:t>•  Cifrado asimétrico: par pública/privada (RSA, ECC). Clave: resuelve la distribución; más lento, se usa para intercambiar claves simétricas.</a:t>
-            </a:r>
-          </a:p>
-          <a:p>
-            <a:pPr>
-              <a:spcAft>
-                <a:spcPts val="600"/>
-              </a:spcAft>
-            </a:pPr>
-            <a:r>
-              <a:rPr sz="1500">
-                <a:solidFill>
-                  <a:srgbClr val="22282E"/>
-                </a:solidFill>
-              </a:rPr>
-              <a:t>•  Función hash criptográfica: mapeo unidireccional resistente a colisiones (SHA-256). Clave: verifica integridad; MD5 y SHA-1 están rotos.</a:t>
-            </a:r>
-          </a:p>
-          <a:p>
-            <a:pPr>
-              <a:spcAft>
-                <a:spcPts val="600"/>
-              </a:spcAft>
-            </a:pPr>
-            <a:r>
-              <a:rPr sz="1500">
-                <a:solidFill>
-                  <a:srgbClr val="22282E"/>
-                </a:solidFill>
-              </a:rPr>
-              <a:t>•  Sal (salt): valor aleatorio único por contraseña. Clave: impide tablas rainbow y que hashes iguales delaten contraseñas iguales.</a:t>
-            </a:r>
-          </a:p>
-          <a:p>
-            <a:pPr>
-              <a:spcAft>
-                <a:spcPts val="600"/>
-              </a:spcAft>
-            </a:pPr>
-            <a:r>
-              <a:rPr sz="1500">
-                <a:solidFill>
-                  <a:srgbClr val="22282E"/>
-                </a:solidFill>
-              </a:rPr>
-              <a:t>•  HMAC: MAC basado en hash + clave secreta. Clave: garantiza integridad y autenticidad, a diferencia de un hash simple.</a:t>
-            </a:r>
-          </a:p>
-          <a:p>
-            <a:pPr>
-              <a:spcAft>
-                <a:spcPts val="600"/>
-              </a:spcAft>
-            </a:pPr>
-            <a:r>
-              <a:rPr sz="1500">
-                <a:solidFill>
-                  <a:srgbClr val="22282E"/>
-                </a:solidFill>
-              </a:rPr>
-              <a:t>•  Firma digital: cifrar un hash con la clave privada. Clave: prueba autoría e integridad (no repudio).</a:t>
+              <a:t>•  Antes de hablar de algoritmos conviene fijar qué queremos proteger, porque cada primitiva resuelve un problema distinto y confundirlos es la raíz de casi todos los diseños inseguros. La…</a:t>
+            </a:r>
+          </a:p>
+          <a:p>
+            <a:pPr>
+              <a:spcAft>
+                <a:spcPts val="600"/>
+              </a:spcAft>
+            </a:pPr>
+            <a:r>
+              <a:rPr sz="1500">
+                <a:solidFill>
+                  <a:srgbClr val="22282E"/>
+                </a:solidFill>
+              </a:rPr>
+              <a:t>•  En el cifrado simétrico la misma clave secreta cifra y descifra. El estándar de facto es AES (Advanced Encryption Standard), un cifrado por bloques de 128 bits con claves de 128, 192 o 256 bits. AES…</a:t>
+            </a:r>
+          </a:p>
+          <a:p>
+            <a:pPr>
+              <a:spcAft>
+                <a:spcPts val="600"/>
+              </a:spcAft>
+            </a:pPr>
+            <a:r>
+              <a:rPr sz="1500">
+                <a:solidFill>
+                  <a:srgbClr val="22282E"/>
+                </a:solidFill>
+              </a:rPr>
+              <a:t>•  El cifrado asimétrico usa un par de claves matemáticamente relacionadas: una pública, que se puede publicar libremente, y una privada, que se guarda en secreto. Lo cifrado con la pública solo se…</a:t>
+            </a:r>
+          </a:p>
+          <a:p>
+            <a:pPr>
+              <a:spcAft>
+                <a:spcPts val="600"/>
+              </a:spcAft>
+            </a:pPr>
+            <a:r>
+              <a:rPr sz="1500">
+                <a:solidFill>
+                  <a:srgbClr val="22282E"/>
+                </a:solidFill>
+              </a:rPr>
+              <a:t>•  Una función hash criptográfica toma una entrada de cualquier tamaño y produce una salida corta de longitud fija (por ejemplo, 256 bits en SHA-256) que actúa como huella digital. Debe cumplir tres…</a:t>
+            </a:r>
+          </a:p>
+          <a:p>
+            <a:pPr>
+              <a:spcAft>
+                <a:spcPts val="600"/>
+              </a:spcAft>
+            </a:pPr>
+            <a:r>
+              <a:rPr sz="1500">
+                <a:solidFill>
+                  <a:srgbClr val="22282E"/>
+                </a:solidFill>
+              </a:rPr>
+              <a:t>•  Almacenar contraseñas es un caso especial que confunde a mucha gente. Nunca se guarda la contraseña en claro ni se "cifra" (cifrar es reversible con la clave). Se guarda un hash, pero no un hash…</a:t>
+            </a:r>
+          </a:p>
+          <a:p>
+            <a:pPr>
+              <a:spcAft>
+                <a:spcPts val="600"/>
+              </a:spcAft>
+            </a:pPr>
+            <a:r>
+              <a:rPr sz="1500">
+                <a:solidFill>
+                  <a:srgbClr val="22282E"/>
+                </a:solidFill>
+              </a:rPr>
+              <a:t>•  HMAC combina una función hash con una clave secreta para producir un código de autenticación de mensaje (MAC). Garantiza a la vez integridad y autenticidad: solo quien conoce la clave puede generar o…</a:t>
             </a:r>
           </a:p>
         </p:txBody>
@@ -4211,7 +4738,7 @@
                   <a:srgbClr val="0B3D2E"/>
                 </a:solidFill>
               </a:rPr>
-              <a:t>🧰 Herramientas y preparación</a:t>
+              <a:t>📖 Definiciones y características</a:t>
             </a:r>
           </a:p>
         </p:txBody>
@@ -4249,37 +4776,97 @@
                   <a:srgbClr val="22282E"/>
                 </a:solidFill>
               </a:rPr>
-              <a:t>•  Usa Python con la librería cryptography (de PyCA) y hashlib. Para contraseñas, bcrypt/argon2-cffi. Instala en tu venv:</a:t>
-            </a:r>
-          </a:p>
-          <a:p>
-            <a:pPr>
-              <a:spcAft>
-                <a:spcPts val="600"/>
-              </a:spcAft>
-            </a:pPr>
-            <a:r>
-              <a:rPr sz="1500">
-                <a:solidFill>
-                  <a:srgbClr val="22282E"/>
-                </a:solidFill>
-              </a:rPr>
-              <a:t>•  pip install cryptography bcrypt argon2-cffi</a:t>
-            </a:r>
-          </a:p>
-          <a:p>
-            <a:pPr>
-              <a:spcAft>
-                <a:spcPts val="600"/>
-              </a:spcAft>
-            </a:pPr>
-            <a:r>
-              <a:rPr sz="1500">
-                <a:solidFill>
-                  <a:srgbClr val="22282E"/>
-                </a:solidFill>
-              </a:rPr>
-              <a:t>•  También openssl en línea de comandos para experimentar. Regla de oro: usa librerías establecidas, nunca implementaciones caseras de primitivas.</a:t>
+              <a:t>•  Cifrado simétrico: esquema donde la misma clave cifra y descifra (AES). Es rápido y apto para grandes volúmenes de datos, pero exige distribuir la clave secreta de forma segura entre las partes, lo…</a:t>
+            </a:r>
+          </a:p>
+          <a:p>
+            <a:pPr>
+              <a:spcAft>
+                <a:spcPts val="600"/>
+              </a:spcAft>
+            </a:pPr>
+            <a:r>
+              <a:rPr sz="1500">
+                <a:solidFill>
+                  <a:srgbClr val="22282E"/>
+                </a:solidFill>
+              </a:rPr>
+              <a:t>•  Cifrado asimétrico: esquema con un par de claves pública/privada (RSA, ECC). Resuelve la distribución de claves porque la pública se publica sin riesgo, a cambio de un coste computacional mucho…</a:t>
+            </a:r>
+          </a:p>
+          <a:p>
+            <a:pPr>
+              <a:spcAft>
+                <a:spcPts val="600"/>
+              </a:spcAft>
+            </a:pPr>
+            <a:r>
+              <a:rPr sz="1500">
+                <a:solidFill>
+                  <a:srgbClr val="22282E"/>
+                </a:solidFill>
+              </a:rPr>
+              <a:t>•  Función hash criptográfica: mapeo unidireccional de datos arbitrarios a una huella de longitud fija (SHA-256). Verifica integridad y es la base de firmas y estructuras como blockchains; MD5 y SHA-1…</a:t>
+            </a:r>
+          </a:p>
+          <a:p>
+            <a:pPr>
+              <a:spcAft>
+                <a:spcPts val="600"/>
+              </a:spcAft>
+            </a:pPr>
+            <a:r>
+              <a:rPr sz="1500">
+                <a:solidFill>
+                  <a:srgbClr val="22282E"/>
+                </a:solidFill>
+              </a:rPr>
+              <a:t>•  Sal (salt): valor aleatorio único que se añade a cada contraseña antes de aplicar el KDF. Neutraliza las rainbow tables y garantiza que contraseñas idénticas produzcan hashes distintos, cerrando un…</a:t>
+            </a:r>
+          </a:p>
+          <a:p>
+            <a:pPr>
+              <a:spcAft>
+                <a:spcPts val="600"/>
+              </a:spcAft>
+            </a:pPr>
+            <a:r>
+              <a:rPr sz="1500">
+                <a:solidFill>
+                  <a:srgbClr val="22282E"/>
+                </a:solidFill>
+              </a:rPr>
+              <a:t>•  KDF de contraseñas: función de derivación deliberadamente lenta y costosa (bcrypt, scrypt, argon2) pensada para resistir fuerza bruta. Su factor de coste ajustable permite endurecer el sistema…</a:t>
+            </a:r>
+          </a:p>
+          <a:p>
+            <a:pPr>
+              <a:spcAft>
+                <a:spcPts val="600"/>
+              </a:spcAft>
+            </a:pPr>
+            <a:r>
+              <a:rPr sz="1500">
+                <a:solidFill>
+                  <a:srgbClr val="22282E"/>
+                </a:solidFill>
+              </a:rPr>
+              <a:t>•  HMAC: código de autenticación de mensaje construido sobre una función hash y una clave secreta. Aporta integridad y autenticidad simultáneamente, algo que un hash simple no puede lograr frente a un…</a:t>
+            </a:r>
+          </a:p>
+          <a:p>
+            <a:pPr>
+              <a:spcAft>
+                <a:spcPts val="600"/>
+              </a:spcAft>
+            </a:pPr>
+            <a:r>
+              <a:rPr sz="1500">
+                <a:solidFill>
+                  <a:srgbClr val="22282E"/>
+                </a:solidFill>
+              </a:rPr>
+              <a:t>•  Firma digital: hash del mensaje transformado con la clave privada del firmante. Prueba autoría (autenticidad), que el contenido no cambió (integridad) y que el firmante no puede desdecirse (no…</a:t>
             </a:r>
           </a:p>
         </p:txBody>
@@ -4330,7 +4917,7 @@
                   <a:srgbClr val="0B3D2E"/>
                 </a:solidFill>
               </a:rPr>
-              <a:t>🧪 Laboratorio guiado</a:t>
+              <a:t>📔 Glosario</a:t>
             </a:r>
           </a:p>
         </p:txBody>
@@ -4368,97 +4955,97 @@
                   <a:srgbClr val="22282E"/>
                 </a:solidFill>
               </a:rPr>
-              <a:t>•  Hash e integridad:</a:t>
-            </a:r>
-          </a:p>
-          <a:p>
-            <a:pPr>
-              <a:spcAft>
-                <a:spcPts val="600"/>
-              </a:spcAft>
-            </a:pPr>
-            <a:r>
-              <a:rPr sz="1500">
-                <a:solidFill>
-                  <a:srgbClr val="22282E"/>
-                </a:solidFill>
-              </a:rPr>
-              <a:t>•  import hashlib</a:t>
-            </a:r>
-          </a:p>
-          <a:p>
-            <a:pPr>
-              <a:spcAft>
-                <a:spcPts val="600"/>
-              </a:spcAft>
-            </a:pPr>
-            <a:r>
-              <a:rPr sz="1500">
-                <a:solidFill>
-                  <a:srgbClr val="22282E"/>
-                </a:solidFill>
-              </a:rPr>
-              <a:t>•  print(hashlib.sha256(b"mensaje").hexdigest())</a:t>
-            </a:r>
-          </a:p>
-          <a:p>
-            <a:pPr>
-              <a:spcAft>
-                <a:spcPts val="600"/>
-              </a:spcAft>
-            </a:pPr>
-            <a:r>
-              <a:rPr sz="1500">
-                <a:solidFill>
-                  <a:srgbClr val="22282E"/>
-                </a:solidFill>
-              </a:rPr>
-              <a:t>•  Cambia un byte del mensaje y observa el efecto avalancha.</a:t>
-            </a:r>
-          </a:p>
-          <a:p>
-            <a:pPr>
-              <a:spcAft>
-                <a:spcPts val="600"/>
-              </a:spcAft>
-            </a:pPr>
-            <a:r>
-              <a:rPr sz="1500">
-                <a:solidFill>
-                  <a:srgbClr val="22282E"/>
-                </a:solidFill>
-              </a:rPr>
-              <a:t>•  Por qué MD5/SHA-1 no valen. Investiga colisiones conocidas y razona por qué no deben usarse para integridad de seguridad.</a:t>
-            </a:r>
-          </a:p>
-          <a:p>
-            <a:pPr>
-              <a:spcAft>
-                <a:spcPts val="600"/>
-              </a:spcAft>
-            </a:pPr>
-            <a:r>
-              <a:rPr sz="1500">
-                <a:solidFill>
-                  <a:srgbClr val="22282E"/>
-                </a:solidFill>
-              </a:rPr>
-              <a:t>•  Cifrado simétrico autenticado con AES-GCM (vía cryptography):</a:t>
-            </a:r>
-          </a:p>
-          <a:p>
-            <a:pPr>
-              <a:spcAft>
-                <a:spcPts val="600"/>
-              </a:spcAft>
-            </a:pPr>
-            <a:r>
-              <a:rPr sz="1500">
-                <a:solidFill>
-                  <a:srgbClr val="22282E"/>
-                </a:solidFill>
-              </a:rPr>
-              <a:t>•  from cryptography.hazmat.primitives.ciphers.aead import AESGCM</a:t>
+              <a:t>•  Término — Definición concisa</a:t>
+            </a:r>
+          </a:p>
+          <a:p>
+            <a:pPr>
+              <a:spcAft>
+                <a:spcPts val="600"/>
+              </a:spcAft>
+            </a:pPr>
+            <a:r>
+              <a:rPr sz="1500">
+                <a:solidFill>
+                  <a:srgbClr val="22282E"/>
+                </a:solidFill>
+              </a:rPr>
+              <a:t>•  AES — Cifrado por bloques simétrico estándar, claves de 128/192/256 bits</a:t>
+            </a:r>
+          </a:p>
+          <a:p>
+            <a:pPr>
+              <a:spcAft>
+                <a:spcPts val="600"/>
+              </a:spcAft>
+            </a:pPr>
+            <a:r>
+              <a:rPr sz="1500">
+                <a:solidFill>
+                  <a:srgbClr val="22282E"/>
+                </a:solidFill>
+              </a:rPr>
+              <a:t>•  RSA — Cifrado/firma asimétrico basado en la factorización de enteros grandes</a:t>
+            </a:r>
+          </a:p>
+          <a:p>
+            <a:pPr>
+              <a:spcAft>
+                <a:spcPts val="600"/>
+              </a:spcAft>
+            </a:pPr>
+            <a:r>
+              <a:rPr sz="1500">
+                <a:solidFill>
+                  <a:srgbClr val="22282E"/>
+                </a:solidFill>
+              </a:rPr>
+              <a:t>•  ECC — Criptografía de curva elíptica; misma seguridad con claves más pequeñas</a:t>
+            </a:r>
+          </a:p>
+          <a:p>
+            <a:pPr>
+              <a:spcAft>
+                <a:spcPts val="600"/>
+              </a:spcAft>
+            </a:pPr>
+            <a:r>
+              <a:rPr sz="1500">
+                <a:solidFill>
+                  <a:srgbClr val="22282E"/>
+                </a:solidFill>
+              </a:rPr>
+              <a:t>•  Hash — Huella de longitud fija de una entrada arbitraria</a:t>
+            </a:r>
+          </a:p>
+          <a:p>
+            <a:pPr>
+              <a:spcAft>
+                <a:spcPts val="600"/>
+              </a:spcAft>
+            </a:pPr>
+            <a:r>
+              <a:rPr sz="1500">
+                <a:solidFill>
+                  <a:srgbClr val="22282E"/>
+                </a:solidFill>
+              </a:rPr>
+              <a:t>•  Colisión — Dos entradas distintas que producen el mismo hash</a:t>
+            </a:r>
+          </a:p>
+          <a:p>
+            <a:pPr>
+              <a:spcAft>
+                <a:spcPts val="600"/>
+              </a:spcAft>
+            </a:pPr>
+            <a:r>
+              <a:rPr sz="1500">
+                <a:solidFill>
+                  <a:srgbClr val="22282E"/>
+                </a:solidFill>
+              </a:rPr>
+              <a:t>•  Efecto avalancha — Un cambio mínimo en la entrada altera medio hash de salida</a:t>
             </a:r>
           </a:p>
         </p:txBody>
@@ -4509,7 +5096,7 @@
                   <a:srgbClr val="0B3D2E"/>
                 </a:solidFill>
               </a:rPr>
-              <a:t>✍️ Ejercicios</a:t>
+              <a:t>🧰 Herramientas y preparación</a:t>
             </a:r>
           </a:p>
         </p:txBody>
@@ -4547,82 +5134,22 @@
                   <a:srgbClr val="22282E"/>
                 </a:solidFill>
               </a:rPr>
-              <a:t>•  Explica con un ejemplo cuándo usarías cifrado simétrico y cuándo asimétrico (y por qué se combinan).</a:t>
-            </a:r>
-          </a:p>
-          <a:p>
-            <a:pPr>
-              <a:spcAft>
-                <a:spcPts val="600"/>
-              </a:spcAft>
-            </a:pPr>
-            <a:r>
-              <a:rPr sz="1500">
-                <a:solidFill>
-                  <a:srgbClr val="22282E"/>
-                </a:solidFill>
-              </a:rPr>
-              <a:t>•  Da tres propiedades que debe cumplir una función hash criptográfica.</a:t>
-            </a:r>
-          </a:p>
-          <a:p>
-            <a:pPr>
-              <a:spcAft>
-                <a:spcPts val="600"/>
-              </a:spcAft>
-            </a:pPr>
-            <a:r>
-              <a:rPr sz="1500">
-                <a:solidFill>
-                  <a:srgbClr val="22282E"/>
-                </a:solidFill>
-              </a:rPr>
-              <a:t>•  Justifica por qué SHA-256 no es adecuado para almacenar contraseñas y qué usar en su lugar.</a:t>
-            </a:r>
-          </a:p>
-          <a:p>
-            <a:pPr>
-              <a:spcAft>
-                <a:spcPts val="600"/>
-              </a:spcAft>
-            </a:pPr>
-            <a:r>
-              <a:rPr sz="1500">
-                <a:solidFill>
-                  <a:srgbClr val="22282E"/>
-                </a:solidFill>
-              </a:rPr>
-              <a:t>•  Describe cómo una firma digital aporta integridad, autenticidad y no repudio.</a:t>
-            </a:r>
-          </a:p>
-          <a:p>
-            <a:pPr>
-              <a:spcAft>
-                <a:spcPts val="600"/>
-              </a:spcAft>
-            </a:pPr>
-            <a:r>
-              <a:rPr sz="1500">
-                <a:solidFill>
-                  <a:srgbClr val="22282E"/>
-                </a:solidFill>
-              </a:rPr>
-              <a:t>•  Explica el papel del IV/nonce y qué ocurre si se reutiliza en algunos modos.</a:t>
-            </a:r>
-          </a:p>
-          <a:p>
-            <a:pPr>
-              <a:spcAft>
-                <a:spcPts val="600"/>
-              </a:spcAft>
-            </a:pPr>
-            <a:r>
-              <a:rPr sz="1500">
-                <a:solidFill>
-                  <a:srgbClr val="22282E"/>
-                </a:solidFill>
-              </a:rPr>
-              <a:t>•  Investiga qué es Diffie-Hellman y cómo permite acordar una clave sin transmitirla.</a:t>
+              <a:t>•  Trabajaremos con Python y la librería cryptography de PyCA, que expone primitivas auditadas y seguras por defecto, además del módulo estándar hashlib. Para contraseñas usaremos bcrypt y argon2-cffi.…</a:t>
+            </a:r>
+          </a:p>
+          <a:p>
+            <a:pPr>
+              <a:spcAft>
+                <a:spcPts val="600"/>
+              </a:spcAft>
+            </a:pPr>
+            <a:r>
+              <a:rPr sz="1500">
+                <a:solidFill>
+                  <a:srgbClr val="22282E"/>
+                </a:solidFill>
+              </a:rPr>
+              <a:t>•  También conviene tener openssl en línea de comandos para experimentar con claves y firmas RSA. La regla de oro que gobierna toda esta clase: usa librerías establecidas y mantenidas, nunca…</a:t>
             </a:r>
           </a:p>
         </p:txBody>
@@ -4673,7 +5200,7 @@
                   <a:srgbClr val="0B3D2E"/>
                 </a:solidFill>
               </a:rPr>
-              <a:t>📝 Reto verificable</a:t>
+              <a:t>🧪 Laboratorio guiado</a:t>
             </a:r>
           </a:p>
         </p:txBody>
@@ -4711,22 +5238,97 @@
                   <a:srgbClr val="22282E"/>
                 </a:solidFill>
               </a:rPr>
-              <a:t>•  Implementa securebox.py, una herramienta que cifre y descifre un archivo con AES-GCM (clave derivada de una contraseña mediante un KDF adecuado como scrypt/argon2 con sal), verificando integridad al descifrar. Debe fallar de forma clara si el archivo fue manipulado o la contraseña es incorrecta.</a:t>
-            </a:r>
-          </a:p>
-          <a:p>
-            <a:pPr>
-              <a:spcAft>
-                <a:spcPts val="600"/>
-              </a:spcAft>
-            </a:pPr>
-            <a:r>
-              <a:rPr sz="1500">
-                <a:solidFill>
-                  <a:srgbClr val="22282E"/>
-                </a:solidFill>
-              </a:rPr>
-              <a:t>•  Criterio de aceptación: un archivo cifrado y luego descifrado con la contraseña correcta se recupera idéntico (mismo SHA-256); alterar un byte del cifrado o usar contraseña errónea produce un error de autenticación explícito, no datos corruptos silenciosos. Usa una librería establecida (PyCA cryptography), sin cripto casera.</a:t>
+              <a:t>•  Hash e integridad. Calcula el hash de un mensaje y observa el efecto avalancha:</a:t>
+            </a:r>
+          </a:p>
+          <a:p>
+            <a:pPr>
+              <a:spcAft>
+                <a:spcPts val="600"/>
+              </a:spcAft>
+            </a:pPr>
+            <a:r>
+              <a:rPr sz="1500">
+                <a:solidFill>
+                  <a:srgbClr val="22282E"/>
+                </a:solidFill>
+              </a:rPr>
+              <a:t>•  Cambia un solo carácter y compara: verás que la salida cambia por completo, sin parecido con la anterior.</a:t>
+            </a:r>
+          </a:p>
+          <a:p>
+            <a:pPr>
+              <a:spcAft>
+                <a:spcPts val="600"/>
+              </a:spcAft>
+            </a:pPr>
+            <a:r>
+              <a:rPr sz="1500">
+                <a:solidFill>
+                  <a:srgbClr val="22282E"/>
+                </a:solidFill>
+              </a:rPr>
+              <a:t>•  Por qué MD5/SHA-1 no valen. Investiga las colisiones documentadas de MD5 y el ataque SHAttered contra SHA-1. Razona por qué una colisión práctica invalida su uso para integridad y firmas, aunque el…</a:t>
+            </a:r>
+          </a:p>
+          <a:p>
+            <a:pPr>
+              <a:spcAft>
+                <a:spcPts val="600"/>
+              </a:spcAft>
+            </a:pPr>
+            <a:r>
+              <a:rPr sz="1500">
+                <a:solidFill>
+                  <a:srgbClr val="22282E"/>
+                </a:solidFill>
+              </a:rPr>
+              <a:t>•  Cifrado simétrico autenticado con AES-GCM vía cryptography:</a:t>
+            </a:r>
+          </a:p>
+          <a:p>
+            <a:pPr>
+              <a:spcAft>
+                <a:spcPts val="600"/>
+              </a:spcAft>
+            </a:pPr>
+            <a:r>
+              <a:rPr sz="1500">
+                <a:solidFill>
+                  <a:srgbClr val="22282E"/>
+                </a:solidFill>
+              </a:rPr>
+              <a:t>•  El nonce debe ser único por mensaje. Prueba a alterar un byte de ct antes de descifrar y observa que la operación lanza una excepción en vez de devolver datos corruptos.</a:t>
+            </a:r>
+          </a:p>
+          <a:p>
+            <a:pPr>
+              <a:spcAft>
+                <a:spcPts val="600"/>
+              </a:spcAft>
+            </a:pPr>
+            <a:r>
+              <a:rPr sz="1500">
+                <a:solidFill>
+                  <a:srgbClr val="22282E"/>
+                </a:solidFill>
+              </a:rPr>
+              <a:t>•  Hash de contraseñas con sal:</a:t>
+            </a:r>
+          </a:p>
+          <a:p>
+            <a:pPr>
+              <a:spcAft>
+                <a:spcPts val="600"/>
+              </a:spcAft>
+            </a:pPr>
+            <a:r>
+              <a:rPr sz="1500">
+                <a:solidFill>
+                  <a:srgbClr val="22282E"/>
+                </a:solidFill>
+              </a:rPr>
+              <a:t>•  Compara con hashear la misma contraseña con SHA-256 "pelado" y razona por qué esto último es inseguro.</a:t>
             </a:r>
           </a:p>
         </p:txBody>
